--- a/assets/powerpoints/module-procedure/C1-diane-explique-etape-par-etape.pptx
+++ b/assets/powerpoints/module-procedure/C1-diane-explique-etape-par-etape.pptx
@@ -4791,7 +4791,7 @@
                 </a:solidFill>
                 <a:latin typeface="Verdana"/>
               </a:rPr>
-              <a:t>SÉANCE C1  ·  MODULE 4</a:t>
+              <a:t>SÉANCE C1  ·  MODULE 5</a:t>
             </a:r>
           </a:p>
         </p:txBody>
